--- a/resources/DevOps on IBMi.pptx
+++ b/resources/DevOps on IBMi.pptx
@@ -151,14 +151,6 @@
 </p:presentation>
 </file>
 
-<file path=ppt/revisionInfo.xml><?xml version="1.0" encoding="utf-8"?>
-<p1510:revInfo xmlns:a="http://schemas.openxmlformats.org/drawingml/2006/main" xmlns:r="http://schemas.openxmlformats.org/officeDocument/2006/relationships" xmlns:p1510="http://schemas.microsoft.com/office/powerpoint/2015/10/main">
-  <p1510:revLst>
-    <p1510:client id="{4FC3A544-8656-49DB-B416-4290F4E89289}" v="2" dt="2024-05-31T02:42:35.374"/>
-  </p1510:revLst>
-</p1510:revInfo>
-</file>
-
 <file path=ppt/changesInfos/changesInfo1.xml><?xml version="1.0" encoding="utf-8"?>
 <pc:chgInfo xmlns:a="http://schemas.openxmlformats.org/drawingml/2006/main" xmlns:r="http://schemas.openxmlformats.org/officeDocument/2006/relationships" xmlns:ac="http://schemas.microsoft.com/office/drawing/2013/main/command" xmlns:pc="http://schemas.microsoft.com/office/powerpoint/2013/main/command">
   <pc:docChgLst>
@@ -190,6 +182,30 @@
             <ac:picMk id="1026" creationId="{BE3F6ACA-D03C-733B-92CE-93AD671A66B2}"/>
           </ac:picMkLst>
         </pc:picChg>
+      </pc:sldChg>
+    </pc:docChg>
+  </pc:docChgLst>
+  <pc:docChgLst>
+    <pc:chgData name="Ravisankar Pandian" userId="ed09f74a-2b53-4ce0-832d-148e0a91ef02" providerId="ADAL" clId="{794513D6-2FDE-421E-814C-889AECDFBD53}"/>
+    <pc:docChg chg="modSld">
+      <pc:chgData name="Ravisankar Pandian" userId="ed09f74a-2b53-4ce0-832d-148e0a91ef02" providerId="ADAL" clId="{794513D6-2FDE-421E-814C-889AECDFBD53}" dt="2024-09-11T06:04:25.266" v="13" actId="20577"/>
+      <pc:docMkLst>
+        <pc:docMk/>
+      </pc:docMkLst>
+      <pc:sldChg chg="modSp mod">
+        <pc:chgData name="Ravisankar Pandian" userId="ed09f74a-2b53-4ce0-832d-148e0a91ef02" providerId="ADAL" clId="{794513D6-2FDE-421E-814C-889AECDFBD53}" dt="2024-09-11T06:04:25.266" v="13" actId="20577"/>
+        <pc:sldMkLst>
+          <pc:docMk/>
+          <pc:sldMk cId="420561970" sldId="292"/>
+        </pc:sldMkLst>
+        <pc:spChg chg="mod">
+          <ac:chgData name="Ravisankar Pandian" userId="ed09f74a-2b53-4ce0-832d-148e0a91ef02" providerId="ADAL" clId="{794513D6-2FDE-421E-814C-889AECDFBD53}" dt="2024-09-11T06:04:25.266" v="13" actId="20577"/>
+          <ac:spMkLst>
+            <pc:docMk/>
+            <pc:sldMk cId="420561970" sldId="292"/>
+            <ac:spMk id="4" creationId="{DF828A0C-8F4D-8B4E-A992-36FED302A132}"/>
+          </ac:spMkLst>
+        </pc:spChg>
       </pc:sldChg>
     </pc:docChg>
   </pc:docChgLst>
@@ -991,7 +1007,7 @@
           <a:p>
             <a:fld id="{75A3273E-3781-48D3-A31F-F752C7DB28AD}" type="datetimeFigureOut">
               <a:rPr lang="en-US" smtClean="0"/>
-              <a:t>5/31/2024</a:t>
+              <a:t>9/11/2024</a:t>
             </a:fld>
             <a:endParaRPr lang="en-US"/>
           </a:p>
@@ -1169,7 +1185,7 @@
           <a:p>
             <a:fld id="{3A9CDE7A-5932-4913-9F1C-43B1E9CC019B}" type="datetimeFigureOut">
               <a:rPr lang="en-US" smtClean="0"/>
-              <a:t>5/31/2024</a:t>
+              <a:t>9/11/2024</a:t>
             </a:fld>
             <a:endParaRPr lang="en-US"/>
           </a:p>
@@ -1584,7 +1600,7 @@
           <a:p>
             <a:fld id="{838FE5D1-9AAE-4E69-9355-139EF2F27780}" type="datetimeFigureOut">
               <a:rPr lang="en-US" smtClean="0"/>
-              <a:t>5/31/2024</a:t>
+              <a:t>9/11/2024</a:t>
             </a:fld>
             <a:endParaRPr lang="en-US"/>
           </a:p>
@@ -1782,7 +1798,7 @@
           <a:p>
             <a:fld id="{838FE5D1-9AAE-4E69-9355-139EF2F27780}" type="datetimeFigureOut">
               <a:rPr lang="en-US" smtClean="0"/>
-              <a:t>5/31/2024</a:t>
+              <a:t>9/11/2024</a:t>
             </a:fld>
             <a:endParaRPr lang="en-US"/>
           </a:p>
@@ -1990,7 +2006,7 @@
           <a:p>
             <a:fld id="{838FE5D1-9AAE-4E69-9355-139EF2F27780}" type="datetimeFigureOut">
               <a:rPr lang="en-US" smtClean="0"/>
-              <a:t>5/31/2024</a:t>
+              <a:t>9/11/2024</a:t>
             </a:fld>
             <a:endParaRPr lang="en-US"/>
           </a:p>
@@ -2188,7 +2204,7 @@
           <a:p>
             <a:fld id="{838FE5D1-9AAE-4E69-9355-139EF2F27780}" type="datetimeFigureOut">
               <a:rPr lang="en-US" smtClean="0"/>
-              <a:t>5/31/2024</a:t>
+              <a:t>9/11/2024</a:t>
             </a:fld>
             <a:endParaRPr lang="en-US"/>
           </a:p>
@@ -2463,7 +2479,7 @@
           <a:p>
             <a:fld id="{838FE5D1-9AAE-4E69-9355-139EF2F27780}" type="datetimeFigureOut">
               <a:rPr lang="en-US" smtClean="0"/>
-              <a:t>5/31/2024</a:t>
+              <a:t>9/11/2024</a:t>
             </a:fld>
             <a:endParaRPr lang="en-US"/>
           </a:p>
@@ -2728,7 +2744,7 @@
           <a:p>
             <a:fld id="{838FE5D1-9AAE-4E69-9355-139EF2F27780}" type="datetimeFigureOut">
               <a:rPr lang="en-US" smtClean="0"/>
-              <a:t>5/31/2024</a:t>
+              <a:t>9/11/2024</a:t>
             </a:fld>
             <a:endParaRPr lang="en-US"/>
           </a:p>
@@ -3140,7 +3156,7 @@
           <a:p>
             <a:fld id="{838FE5D1-9AAE-4E69-9355-139EF2F27780}" type="datetimeFigureOut">
               <a:rPr lang="en-US" smtClean="0"/>
-              <a:t>5/31/2024</a:t>
+              <a:t>9/11/2024</a:t>
             </a:fld>
             <a:endParaRPr lang="en-US"/>
           </a:p>
@@ -3281,7 +3297,7 @@
           <a:p>
             <a:fld id="{838FE5D1-9AAE-4E69-9355-139EF2F27780}" type="datetimeFigureOut">
               <a:rPr lang="en-US" smtClean="0"/>
-              <a:t>5/31/2024</a:t>
+              <a:t>9/11/2024</a:t>
             </a:fld>
             <a:endParaRPr lang="en-US"/>
           </a:p>
@@ -3394,7 +3410,7 @@
           <a:p>
             <a:fld id="{838FE5D1-9AAE-4E69-9355-139EF2F27780}" type="datetimeFigureOut">
               <a:rPr lang="en-US" smtClean="0"/>
-              <a:t>5/31/2024</a:t>
+              <a:t>9/11/2024</a:t>
             </a:fld>
             <a:endParaRPr lang="en-US"/>
           </a:p>
@@ -3705,7 +3721,7 @@
           <a:p>
             <a:fld id="{838FE5D1-9AAE-4E69-9355-139EF2F27780}" type="datetimeFigureOut">
               <a:rPr lang="en-US" smtClean="0"/>
-              <a:t>5/31/2024</a:t>
+              <a:t>9/11/2024</a:t>
             </a:fld>
             <a:endParaRPr lang="en-US"/>
           </a:p>
@@ -3993,7 +4009,7 @@
           <a:p>
             <a:fld id="{838FE5D1-9AAE-4E69-9355-139EF2F27780}" type="datetimeFigureOut">
               <a:rPr lang="en-US" smtClean="0"/>
-              <a:t>5/31/2024</a:t>
+              <a:t>9/11/2024</a:t>
             </a:fld>
             <a:endParaRPr lang="en-US"/>
           </a:p>
@@ -4234,7 +4250,7 @@
           <a:p>
             <a:fld id="{838FE5D1-9AAE-4E69-9355-139EF2F27780}" type="datetimeFigureOut">
               <a:rPr lang="en-US" smtClean="0"/>
-              <a:t>5/31/2024</a:t>
+              <a:t>9/11/2024</a:t>
             </a:fld>
             <a:endParaRPr lang="en-US"/>
           </a:p>
@@ -13369,7 +13385,7 @@
                 </a:solidFill>
                 <a:latin typeface="Calibri   "/>
               </a:rPr>
-              <a:t>Choose your GIT </a:t>
+              <a:t>Choose your own </a:t>
             </a:r>
             <a:r>
               <a:rPr lang="en-US" altLang="en-US" sz="2800" dirty="0" err="1">
@@ -13379,6 +13395,15 @@
                 <a:latin typeface="Calibri   "/>
               </a:rPr>
               <a:t>flavour</a:t>
+            </a:r>
+            <a:r>
+              <a:rPr lang="en-US" altLang="en-US" sz="2800">
+                <a:solidFill>
+                  <a:srgbClr val="FFFFFF"/>
+                </a:solidFill>
+                <a:latin typeface="Calibri   "/>
+              </a:rPr>
+              <a:t> of GIT</a:t>
             </a:r>
             <a:endParaRPr lang="en-US" altLang="en-US" sz="2800" dirty="0">
               <a:solidFill>
@@ -16246,6 +16271,23 @@
 </file>
 
 <file path=customXml/item1.xml><?xml version="1.0" encoding="utf-8"?>
+<p:properties xmlns:p="http://schemas.microsoft.com/office/2006/metadata/properties" xmlns:xsi="http://www.w3.org/2001/XMLSchema-instance" xmlns:pc="http://schemas.microsoft.com/office/infopath/2007/PartnerControls">
+  <documentManagement>
+    <_activity xmlns="33314088-60db-4a22-969a-9bb9476d1771" xsi:nil="true"/>
+  </documentManagement>
+</p:properties>
+</file>
+
+<file path=customXml/item2.xml><?xml version="1.0" encoding="utf-8"?>
+<?mso-contentType ?>
+<FormTemplates xmlns="http://schemas.microsoft.com/sharepoint/v3/contenttype/forms">
+  <Display>DocumentLibraryForm</Display>
+  <Edit>DocumentLibraryForm</Edit>
+  <New>DocumentLibraryForm</New>
+</FormTemplates>
+</file>
+
+<file path=customXml/item3.xml><?xml version="1.0" encoding="utf-8"?>
 <ct:contentTypeSchema xmlns:ct="http://schemas.microsoft.com/office/2006/metadata/contentType" xmlns:ma="http://schemas.microsoft.com/office/2006/metadata/properties/metaAttributes" ct:_="" ma:_="" ma:contentTypeName="Document" ma:contentTypeID="0x0101001D008EE04551664E99EE517CC9492B21" ma:contentTypeVersion="15" ma:contentTypeDescription="Create a new document." ma:contentTypeScope="" ma:versionID="cd88482bd8e14b9f7a01235aad4a4f49">
   <xsd:schema xmlns:xsd="http://www.w3.org/2001/XMLSchema" xmlns:xs="http://www.w3.org/2001/XMLSchema" xmlns:p="http://schemas.microsoft.com/office/2006/metadata/properties" xmlns:ns3="33314088-60db-4a22-969a-9bb9476d1771" xmlns:ns4="44b119f1-e575-4f2a-9ac9-d12be3ecff41" targetNamespace="http://schemas.microsoft.com/office/2006/metadata/properties" ma:root="true" ma:fieldsID="464f4138993d4c5dc616436e66b8c209" ns3:_="" ns4:_="">
     <xsd:import namespace="33314088-60db-4a22-969a-9bb9476d1771"/>
@@ -16478,24 +16520,32 @@
 </ct:contentTypeSchema>
 </file>
 
-<file path=customXml/item2.xml><?xml version="1.0" encoding="utf-8"?>
-<?mso-contentType ?>
-<FormTemplates xmlns="http://schemas.microsoft.com/sharepoint/v3/contenttype/forms">
-  <Display>DocumentLibraryForm</Display>
-  <Edit>DocumentLibraryForm</Edit>
-  <New>DocumentLibraryForm</New>
-</FormTemplates>
+<file path=customXml/itemProps1.xml><?xml version="1.0" encoding="utf-8"?>
+<ds:datastoreItem xmlns:ds="http://schemas.openxmlformats.org/officeDocument/2006/customXml" ds:itemID="{2C7AF218-50EE-4143-8163-B3A788E8FC81}">
+  <ds:schemaRefs>
+    <ds:schemaRef ds:uri="http://purl.org/dc/dcmitype/"/>
+    <ds:schemaRef ds:uri="http://purl.org/dc/elements/1.1/"/>
+    <ds:schemaRef ds:uri="http://schemas.microsoft.com/office/2006/metadata/properties"/>
+    <ds:schemaRef ds:uri="44b119f1-e575-4f2a-9ac9-d12be3ecff41"/>
+    <ds:schemaRef ds:uri="http://schemas.microsoft.com/office/2006/documentManagement/types"/>
+    <ds:schemaRef ds:uri="http://schemas.microsoft.com/office/infopath/2007/PartnerControls"/>
+    <ds:schemaRef ds:uri="http://purl.org/dc/terms/"/>
+    <ds:schemaRef ds:uri="http://schemas.openxmlformats.org/package/2006/metadata/core-properties"/>
+    <ds:schemaRef ds:uri="33314088-60db-4a22-969a-9bb9476d1771"/>
+    <ds:schemaRef ds:uri="http://www.w3.org/XML/1998/namespace"/>
+  </ds:schemaRefs>
+</ds:datastoreItem>
 </file>
 
-<file path=customXml/item3.xml><?xml version="1.0" encoding="utf-8"?>
-<p:properties xmlns:p="http://schemas.microsoft.com/office/2006/metadata/properties" xmlns:xsi="http://www.w3.org/2001/XMLSchema-instance" xmlns:pc="http://schemas.microsoft.com/office/infopath/2007/PartnerControls">
-  <documentManagement>
-    <_activity xmlns="33314088-60db-4a22-969a-9bb9476d1771" xsi:nil="true"/>
-  </documentManagement>
-</p:properties>
+<file path=customXml/itemProps2.xml><?xml version="1.0" encoding="utf-8"?>
+<ds:datastoreItem xmlns:ds="http://schemas.openxmlformats.org/officeDocument/2006/customXml" ds:itemID="{A0A7A02C-8472-44A3-BDE2-46E1BA4C2268}">
+  <ds:schemaRefs>
+    <ds:schemaRef ds:uri="http://schemas.microsoft.com/sharepoint/v3/contenttype/forms"/>
+  </ds:schemaRefs>
+</ds:datastoreItem>
 </file>
 
-<file path=customXml/itemProps1.xml><?xml version="1.0" encoding="utf-8"?>
+<file path=customXml/itemProps3.xml><?xml version="1.0" encoding="utf-8"?>
 <ds:datastoreItem xmlns:ds="http://schemas.openxmlformats.org/officeDocument/2006/customXml" ds:itemID="{6FF384F0-795B-4130-B7B5-CF497B842844}">
   <ds:schemaRefs>
     <ds:schemaRef ds:uri="http://schemas.microsoft.com/office/2006/metadata/contentType"/>
@@ -16512,29 +16562,4 @@
     <ds:schemaRef ds:uri="http://schemas.microsoft.com/internal/obd"/>
   </ds:schemaRefs>
 </ds:datastoreItem>
-</file>
-
-<file path=customXml/itemProps2.xml><?xml version="1.0" encoding="utf-8"?>
-<ds:datastoreItem xmlns:ds="http://schemas.openxmlformats.org/officeDocument/2006/customXml" ds:itemID="{A0A7A02C-8472-44A3-BDE2-46E1BA4C2268}">
-  <ds:schemaRefs>
-    <ds:schemaRef ds:uri="http://schemas.microsoft.com/sharepoint/v3/contenttype/forms"/>
-  </ds:schemaRefs>
-</ds:datastoreItem>
-</file>
-
-<file path=customXml/itemProps3.xml><?xml version="1.0" encoding="utf-8"?>
-<ds:datastoreItem xmlns:ds="http://schemas.openxmlformats.org/officeDocument/2006/customXml" ds:itemID="{2C7AF218-50EE-4143-8163-B3A788E8FC81}">
-  <ds:schemaRefs>
-    <ds:schemaRef ds:uri="http://purl.org/dc/dcmitype/"/>
-    <ds:schemaRef ds:uri="http://purl.org/dc/elements/1.1/"/>
-    <ds:schemaRef ds:uri="http://schemas.microsoft.com/office/2006/metadata/properties"/>
-    <ds:schemaRef ds:uri="44b119f1-e575-4f2a-9ac9-d12be3ecff41"/>
-    <ds:schemaRef ds:uri="http://schemas.microsoft.com/office/2006/documentManagement/types"/>
-    <ds:schemaRef ds:uri="http://schemas.microsoft.com/office/infopath/2007/PartnerControls"/>
-    <ds:schemaRef ds:uri="http://purl.org/dc/terms/"/>
-    <ds:schemaRef ds:uri="http://schemas.openxmlformats.org/package/2006/metadata/core-properties"/>
-    <ds:schemaRef ds:uri="33314088-60db-4a22-969a-9bb9476d1771"/>
-    <ds:schemaRef ds:uri="http://www.w3.org/XML/1998/namespace"/>
-  </ds:schemaRefs>
-</ds:datastoreItem>
 </file>